--- a/Final Presentation/Parking Slides - 23072026.pptx
+++ b/Final Presentation/Parking Slides - 23072026.pptx
@@ -9980,7 +9980,7 @@
                 </a:solidFill>
                 <a:latin typeface="Calibri"/>
               </a:rPr>
-              <a:t>(peak hour)</a:t>
+              <a:t>(% of spaces removed)</a:t>
             </a:r>
           </a:p>
         </p:txBody>
@@ -10019,7 +10019,7 @@
                 </a:solidFill>
                 <a:latin typeface="Calibri"/>
               </a:rPr>
-              <a:t>Re-absorbed on</a:t>
+              <a:t>Re-absorbed</a:t>
             </a:r>
           </a:p>
           <a:p>
@@ -10035,7 +10035,7 @@
                 </a:solidFill>
                 <a:latin typeface="Calibri"/>
               </a:rPr>
-              <a:t>nearby streets</a:t>
+              <a:t>(% of displaced)</a:t>
             </a:r>
           </a:p>
         </p:txBody>
@@ -10455,7 +10455,7 @@
                 </a:solidFill>
                 <a:latin typeface="Calibri"/>
               </a:rPr>
-              <a:t>310</a:t>
+              <a:t>408</a:t>
             </a:r>
           </a:p>
         </p:txBody>
@@ -10494,7 +10494,7 @@
                 </a:solidFill>
                 <a:latin typeface="Calibri"/>
               </a:rPr>
-              <a:t>250</a:t>
+              <a:t>81%</a:t>
             </a:r>
           </a:p>
         </p:txBody>
@@ -10533,7 +10533,7 @@
                 </a:solidFill>
                 <a:latin typeface="Calibri"/>
               </a:rPr>
-              <a:t>14%</a:t>
+              <a:t>10%</a:t>
             </a:r>
           </a:p>
         </p:txBody>
@@ -10902,7 +10902,7 @@
                 </a:solidFill>
                 <a:latin typeface="Calibri"/>
               </a:rPr>
-              <a:t>131</a:t>
+              <a:t>99%</a:t>
             </a:r>
           </a:p>
         </p:txBody>
@@ -11316,7 +11316,7 @@
                 </a:solidFill>
                 <a:latin typeface="Calibri"/>
               </a:rPr>
-              <a:t>108</a:t>
+              <a:t>253</a:t>
             </a:r>
           </a:p>
         </p:txBody>
@@ -11355,7 +11355,7 @@
                 </a:solidFill>
                 <a:latin typeface="Calibri"/>
               </a:rPr>
-              <a:t>93</a:t>
+              <a:t>89%</a:t>
             </a:r>
           </a:p>
         </p:txBody>
@@ -11763,7 +11763,7 @@
                 </a:solidFill>
                 <a:latin typeface="Calibri"/>
               </a:rPr>
-              <a:t>150</a:t>
+              <a:t>52%</a:t>
             </a:r>
           </a:p>
         </p:txBody>
@@ -12216,7 +12216,7 @@
                 </a:solidFill>
                 <a:latin typeface="Calibri"/>
               </a:rPr>
-              <a:t>185</a:t>
+              <a:t>42%</a:t>
             </a:r>
           </a:p>
         </p:txBody>
@@ -12624,7 +12624,7 @@
                 </a:solidFill>
                 <a:latin typeface="Calibri"/>
               </a:rPr>
-              <a:t>99</a:t>
+              <a:t>27%</a:t>
             </a:r>
           </a:p>
         </p:txBody>
@@ -12872,7 +12872,7 @@
                 </a:solidFill>
                 <a:latin typeface="Calibri"/>
               </a:rPr>
-              <a:t>•  Kentron and Komitas peak over capacity yet re-absorb only 14% and 0% nearby; Malatia-Sebastia peaks at 54% and re-absorbs 97% — so the package is applied by zone, not uniformly.</a:t>
+              <a:t>•  Kentron and Komitas peak over capacity yet re-absorb only 10% and 0% nearby; Malatia-Sebastia peaks at 54% and re-absorbs 97% — so the package is applied by zone, not uniformly.</a:t>
             </a:r>
           </a:p>
         </p:txBody>
@@ -12911,25 +12911,7 @@
                 </a:solidFill>
                 <a:latin typeface="Calibri"/>
               </a:rPr>
-              <a:t>Peak occupancy = distinct vehicles recorded over the busiest hour ÷ the number of spaces; above 100% means more distinct vehicles than spaces used the </a:t>
-            </a:r>
-            <a:r>
-              <a:rPr sz="800" i="1" dirty="0" err="1">
-                <a:solidFill>
-                  <a:srgbClr val="666666"/>
-                </a:solidFill>
-                <a:latin typeface="Calibri"/>
-              </a:rPr>
-              <a:t>kerb</a:t>
-            </a:r>
-            <a:r>
-              <a:rPr sz="800" i="1" dirty="0">
-                <a:solidFill>
-                  <a:srgbClr val="666666"/>
-                </a:solidFill>
-                <a:latin typeface="Calibri"/>
-              </a:rPr>
-              <a:t> within that hour. Spaces removed and displaced demand are for the surveyed areas only, not corridor-wide. Source: field occupancy survey, 29 May – 3 June 2026.</a:t>
+              <a:t>Peak occupancy = distinct vehicles over the busiest hour ÷ spaces; above 100% means more distinct vehicles than spaces used the kerb in that hour. It sums each zone's own peak hour, so zones busiest at different times are added together. Displaced (% of spaces removed) instead counts one shared clock hour — a stricter basis, so the two columns are not directly comparable; on the single-hour basis Kentron reads 89% and Komitas 83%. Surveyed areas only, not corridor-wide. Source: field occupancy survey, 29 May – 3 June 2026.</a:t>
             </a:r>
           </a:p>
         </p:txBody>
@@ -15555,14 +15537,14 @@
       </p:sp>
       <p:pic>
         <p:nvPicPr>
-          <p:cNvPr id="28" name="Picture 27" descr="chart_displacement.png"/>
+          <p:cNvPr id="44" name="Picture 43" descr="chart_displacement.png"/>
           <p:cNvPicPr>
             <a:picLocks noChangeAspect="1"/>
           </p:cNvPicPr>
           <p:nvPr/>
         </p:nvPicPr>
         <p:blipFill>
-          <a:blip r:embed="rId2"/>
+          <a:blip r:embed="rId3"/>
           <a:stretch>
             <a:fillRect/>
           </a:stretch>
@@ -15703,7 +15685,7 @@
                 </a:solidFill>
                 <a:latin typeface="Calibri"/>
               </a:rPr>
-              <a:t>55%</a:t>
+              <a:t>59%</a:t>
             </a:r>
           </a:p>
         </p:txBody>
@@ -15873,7 +15855,7 @@
                 </a:solidFill>
                 <a:latin typeface="Calibri"/>
               </a:rPr>
-              <a:t>43%</a:t>
+              <a:t>35%</a:t>
             </a:r>
           </a:p>
         </p:txBody>
@@ -16121,7 +16103,7 @@
                 </a:solidFill>
                 <a:latin typeface="Calibri"/>
               </a:rPr>
-              <a:t>Open and manage the yards BEFORE removing kerb: nearby streets absorb only 43% (14% in Kentron, 0% in Komitas). Re-absorption reaches ~100% only via off-street, and 92% of that is gated residential yards.</a:t>
+              <a:t>Open and manage the yards BEFORE removing kerb: nearby streets absorb only 35% (10% in Kentron, 0% in Komitas). Re-absorption reaches ~100% only via off-street, and 92% of that is gated residential yards.</a:t>
             </a:r>
           </a:p>
         </p:txBody>
@@ -16194,7 +16176,7 @@
                 </a:solidFill>
                 <a:latin typeface="Calibri"/>
               </a:rPr>
-              <a:t>The 55% is the displaced demand set against the spaces removed in the same six areas (908 vehicles ÷ 1,643 spaces): the kerb is not full at the moment, so fewer vehicles need re-homing than spaces are lost. Corridor-wide figures cover Corridors 1 and 2 only — Corridor 3 is excluded pending its conceptual design — and will be updated once that design is finalized.</a:t>
+              <a:t>The 59% is the displaced demand set against the spaces removed in the same six areas (1,120 vehicles ÷ 1,886 spaces): the kerb is not full at the moment, so fewer vehicles need re-homing than spaces are lost. Corridor-wide figures cover Corridors 1 and 2 only — Corridor 3 is excluded pending its conceptual design — and will be updated once that design is finalized.</a:t>
             </a:r>
           </a:p>
         </p:txBody>
